--- a/units/unit09_sharedmem/sharedmem.pptx
+++ b/units/unit09_sharedmem/sharedmem.pptx
@@ -254,7 +254,7 @@
           <a:p>
             <a:fld id="{B7D6DDD3-D7E9-488B-B626-1E8285E424D8}" type="datetimeFigureOut">
               <a:rPr lang="en-US" smtClean="0"/>
-              <a:t>4/13/2026</a:t>
+              <a:t>4/23/2026</a:t>
             </a:fld>
             <a:endParaRPr lang="en-US"/>
           </a:p>
@@ -6664,8 +6664,8 @@
           </a:p>
         </p:txBody>
       </p:sp>
-      <mc:AlternateContent xmlns:mc="http://schemas.openxmlformats.org/markup-compatibility/2006">
-        <mc:Choice xmlns:a14="http://schemas.microsoft.com/office/drawing/2010/main" Requires="a14">
+      <mc:AlternateContent xmlns:mc="http://schemas.openxmlformats.org/markup-compatibility/2006" xmlns:a14="http://schemas.microsoft.com/office/drawing/2010/main">
+        <mc:Choice Requires="a14">
           <p:sp>
             <p:nvSpPr>
               <p:cNvPr id="7" name="TextBox 6">
@@ -6713,7 +6713,7 @@
             </p:txBody>
           </p:sp>
         </mc:Choice>
-        <mc:Fallback>
+        <mc:Fallback xmlns="">
           <p:sp>
             <p:nvSpPr>
               <p:cNvPr id="7" name="TextBox 6">
@@ -6758,8 +6758,8 @@
           </p:sp>
         </mc:Fallback>
       </mc:AlternateContent>
-      <mc:AlternateContent xmlns:mc="http://schemas.openxmlformats.org/markup-compatibility/2006">
-        <mc:Choice xmlns:a14="http://schemas.microsoft.com/office/drawing/2010/main" Requires="a14">
+      <mc:AlternateContent xmlns:mc="http://schemas.openxmlformats.org/markup-compatibility/2006" xmlns:a14="http://schemas.microsoft.com/office/drawing/2010/main">
+        <mc:Choice Requires="a14">
           <p:sp>
             <p:nvSpPr>
               <p:cNvPr id="24" name="TextBox 23">
@@ -6807,7 +6807,7 @@
             </p:txBody>
           </p:sp>
         </mc:Choice>
-        <mc:Fallback>
+        <mc:Fallback xmlns="">
           <p:sp>
             <p:nvSpPr>
               <p:cNvPr id="24" name="TextBox 23">
@@ -7263,8 +7263,8 @@
           </a:p>
         </p:txBody>
       </p:sp>
-      <mc:AlternateContent xmlns:mc="http://schemas.openxmlformats.org/markup-compatibility/2006">
-        <mc:Choice xmlns:a14="http://schemas.microsoft.com/office/drawing/2010/main" Requires="a14">
+      <mc:AlternateContent xmlns:mc="http://schemas.openxmlformats.org/markup-compatibility/2006" xmlns:a14="http://schemas.microsoft.com/office/drawing/2010/main">
+        <mc:Choice Requires="a14">
           <p:sp>
             <p:nvSpPr>
               <p:cNvPr id="3" name="Content Placeholder 2">
@@ -7501,7 +7501,7 @@
             </p:txBody>
           </p:sp>
         </mc:Choice>
-        <mc:Fallback>
+        <mc:Fallback xmlns="">
           <p:sp>
             <p:nvSpPr>
               <p:cNvPr id="3" name="Content Placeholder 2">
@@ -16759,8 +16759,8 @@
           </a:graphicData>
         </a:graphic>
       </p:graphicFrame>
-      <mc:AlternateContent xmlns:mc="http://schemas.openxmlformats.org/markup-compatibility/2006">
-        <mc:Choice xmlns:a14="http://schemas.microsoft.com/office/drawing/2010/main" Requires="a14">
+      <mc:AlternateContent xmlns:mc="http://schemas.openxmlformats.org/markup-compatibility/2006" xmlns:a14="http://schemas.microsoft.com/office/drawing/2010/main">
+        <mc:Choice Requires="a14">
           <p:sp>
             <p:nvSpPr>
               <p:cNvPr id="8" name="Content Placeholder 7">
@@ -16846,7 +16846,7 @@
             </p:txBody>
           </p:sp>
         </mc:Choice>
-        <mc:Fallback>
+        <mc:Fallback xmlns="">
           <p:sp>
             <p:nvSpPr>
               <p:cNvPr id="8" name="Content Placeholder 7">
@@ -21896,8 +21896,8 @@
           </a:p>
         </p:txBody>
       </p:sp>
-      <mc:AlternateContent xmlns:mc="http://schemas.openxmlformats.org/markup-compatibility/2006">
-        <mc:Choice xmlns:a14="http://schemas.microsoft.com/office/drawing/2010/main" Requires="a14">
+      <mc:AlternateContent xmlns:mc="http://schemas.openxmlformats.org/markup-compatibility/2006" xmlns:a14="http://schemas.microsoft.com/office/drawing/2010/main">
+        <mc:Choice Requires="a14">
           <p:sp>
             <p:nvSpPr>
               <p:cNvPr id="3" name="Content Placeholder 2">
@@ -22120,7 +22120,7 @@
             </p:txBody>
           </p:sp>
         </mc:Choice>
-        <mc:Fallback>
+        <mc:Fallback xmlns="">
           <p:sp>
             <p:nvSpPr>
               <p:cNvPr id="3" name="Content Placeholder 2">
